--- a/tests/testdata/excel/混在/同名.pptx
+++ b/tests/testdata/excel/混在/同名.pptx
@@ -129,7 +129,7 @@
           <p:cNvPr id="2" name="タイトル 1">
             <a:extLst>
               <a:ext uri="{FF2B5EF4-FFF2-40B4-BE49-F238E27FC236}">
-                <a16:creationId xmlns:a16="http://schemas.microsoft.com/office/drawing/2014/main" id="{85BA47A3-FEB7-D6A6-9135-B7D74824B102}"/>
+                <a16:creationId xmlns:a16="http://schemas.microsoft.com/office/drawing/2014/main" id="{1E3D9347-967B-A496-6735-521D04840041}"/>
               </a:ext>
             </a:extLst>
           </p:cNvPr>
@@ -166,7 +166,7 @@
           <p:cNvPr id="3" name="字幕 2">
             <a:extLst>
               <a:ext uri="{FF2B5EF4-FFF2-40B4-BE49-F238E27FC236}">
-                <a16:creationId xmlns:a16="http://schemas.microsoft.com/office/drawing/2014/main" id="{DCA0610C-7D04-1383-2FE3-64A56444E75C}"/>
+                <a16:creationId xmlns:a16="http://schemas.microsoft.com/office/drawing/2014/main" id="{DE494F53-5716-C7DB-0A86-1879D017CF2C}"/>
               </a:ext>
             </a:extLst>
           </p:cNvPr>
@@ -236,7 +236,7 @@
           <p:cNvPr id="4" name="日付プレースホルダー 3">
             <a:extLst>
               <a:ext uri="{FF2B5EF4-FFF2-40B4-BE49-F238E27FC236}">
-                <a16:creationId xmlns:a16="http://schemas.microsoft.com/office/drawing/2014/main" id="{0188C68F-DE35-7912-7A11-3424D7C85934}"/>
+                <a16:creationId xmlns:a16="http://schemas.microsoft.com/office/drawing/2014/main" id="{BC880C63-32C9-8530-D26E-53A775067E5B}"/>
               </a:ext>
             </a:extLst>
           </p:cNvPr>
@@ -252,7 +252,7 @@
           <a:bodyPr/>
           <a:lstStyle/>
           <a:p>
-            <a:fld id="{6B578DF8-FB2F-46D3-B110-102981A138C5}" type="datetimeFigureOut">
+            <a:fld id="{C3E17197-C805-4071-8EFC-A7354228F1B8}" type="datetimeFigureOut">
               <a:rPr kumimoji="1" lang="ja-JP" altLang="en-US" smtClean="0"/>
               <a:t>2026/9/20</a:t>
             </a:fld>
@@ -265,7 +265,7 @@
           <p:cNvPr id="5" name="フッター プレースホルダー 4">
             <a:extLst>
               <a:ext uri="{FF2B5EF4-FFF2-40B4-BE49-F238E27FC236}">
-                <a16:creationId xmlns:a16="http://schemas.microsoft.com/office/drawing/2014/main" id="{97FB82B8-7088-9BA8-380E-127670566F79}"/>
+                <a16:creationId xmlns:a16="http://schemas.microsoft.com/office/drawing/2014/main" id="{3912935C-2CEE-7BE6-48FF-E576C20B2964}"/>
               </a:ext>
             </a:extLst>
           </p:cNvPr>
@@ -290,7 +290,7 @@
           <p:cNvPr id="6" name="スライド番号プレースホルダー 5">
             <a:extLst>
               <a:ext uri="{FF2B5EF4-FFF2-40B4-BE49-F238E27FC236}">
-                <a16:creationId xmlns:a16="http://schemas.microsoft.com/office/drawing/2014/main" id="{85BDDC0C-3565-F464-5C1A-A853E8CE2D31}"/>
+                <a16:creationId xmlns:a16="http://schemas.microsoft.com/office/drawing/2014/main" id="{7D5E404B-0D46-000B-998E-F27FB2B45F51}"/>
               </a:ext>
             </a:extLst>
           </p:cNvPr>
@@ -306,7 +306,7 @@
           <a:bodyPr/>
           <a:lstStyle/>
           <a:p>
-            <a:fld id="{FBB834C8-1C69-4AE2-ABD8-739AFBCCE343}" type="slidenum">
+            <a:fld id="{60E826E4-EB5D-4DEC-AE89-FEC89D45D90D}" type="slidenum">
               <a:rPr kumimoji="1" lang="ja-JP" altLang="en-US" smtClean="0"/>
               <a:t>‹#›</a:t>
             </a:fld>
@@ -317,7 +317,7 @@
     </p:spTree>
     <p:extLst>
       <p:ext uri="{BB962C8B-B14F-4D97-AF65-F5344CB8AC3E}">
-        <p14:creationId xmlns:p14="http://schemas.microsoft.com/office/powerpoint/2010/main" val="685063741"/>
+        <p14:creationId xmlns:p14="http://schemas.microsoft.com/office/powerpoint/2010/main" val="3746337189"/>
       </p:ext>
     </p:extLst>
   </p:cSld>
@@ -349,7 +349,7 @@
           <p:cNvPr id="2" name="タイトル 1">
             <a:extLst>
               <a:ext uri="{FF2B5EF4-FFF2-40B4-BE49-F238E27FC236}">
-                <a16:creationId xmlns:a16="http://schemas.microsoft.com/office/drawing/2014/main" id="{E6216BBF-0D7C-0C1C-06E3-63CCA3DE7127}"/>
+                <a16:creationId xmlns:a16="http://schemas.microsoft.com/office/drawing/2014/main" id="{8ADC0969-AE22-CA6B-1852-E7730C7012C5}"/>
               </a:ext>
             </a:extLst>
           </p:cNvPr>
@@ -377,7 +377,7 @@
           <p:cNvPr id="3" name="縦書きテキスト プレースホルダー 2">
             <a:extLst>
               <a:ext uri="{FF2B5EF4-FFF2-40B4-BE49-F238E27FC236}">
-                <a16:creationId xmlns:a16="http://schemas.microsoft.com/office/drawing/2014/main" id="{375EB612-DC18-4995-1C5E-B27EE1369078}"/>
+                <a16:creationId xmlns:a16="http://schemas.microsoft.com/office/drawing/2014/main" id="{3598CFA6-1B75-C66D-3C4B-51D0DF35C8D5}"/>
               </a:ext>
             </a:extLst>
           </p:cNvPr>
@@ -466,7 +466,7 @@
           <p:cNvPr id="4" name="日付プレースホルダー 3">
             <a:extLst>
               <a:ext uri="{FF2B5EF4-FFF2-40B4-BE49-F238E27FC236}">
-                <a16:creationId xmlns:a16="http://schemas.microsoft.com/office/drawing/2014/main" id="{A78E74F0-63D2-C2D9-7234-2555E26917FE}"/>
+                <a16:creationId xmlns:a16="http://schemas.microsoft.com/office/drawing/2014/main" id="{4E7ABCDB-9FF1-399A-0E3D-389E4445D815}"/>
               </a:ext>
             </a:extLst>
           </p:cNvPr>
@@ -482,7 +482,7 @@
           <a:bodyPr/>
           <a:lstStyle/>
           <a:p>
-            <a:fld id="{6B578DF8-FB2F-46D3-B110-102981A138C5}" type="datetimeFigureOut">
+            <a:fld id="{C3E17197-C805-4071-8EFC-A7354228F1B8}" type="datetimeFigureOut">
               <a:rPr kumimoji="1" lang="ja-JP" altLang="en-US" smtClean="0"/>
               <a:t>2026/9/20</a:t>
             </a:fld>
@@ -495,7 +495,7 @@
           <p:cNvPr id="5" name="フッター プレースホルダー 4">
             <a:extLst>
               <a:ext uri="{FF2B5EF4-FFF2-40B4-BE49-F238E27FC236}">
-                <a16:creationId xmlns:a16="http://schemas.microsoft.com/office/drawing/2014/main" id="{3DDACBD5-E944-7FEB-57A9-33873B6324EC}"/>
+                <a16:creationId xmlns:a16="http://schemas.microsoft.com/office/drawing/2014/main" id="{B772B8D2-3CFE-E5E3-1C8C-ADE49DC995B0}"/>
               </a:ext>
             </a:extLst>
           </p:cNvPr>
@@ -520,7 +520,7 @@
           <p:cNvPr id="6" name="スライド番号プレースホルダー 5">
             <a:extLst>
               <a:ext uri="{FF2B5EF4-FFF2-40B4-BE49-F238E27FC236}">
-                <a16:creationId xmlns:a16="http://schemas.microsoft.com/office/drawing/2014/main" id="{7B2AC408-AC04-55FF-A2A8-4099057A2300}"/>
+                <a16:creationId xmlns:a16="http://schemas.microsoft.com/office/drawing/2014/main" id="{B7985BC9-DFCF-2609-7034-E86422F14452}"/>
               </a:ext>
             </a:extLst>
           </p:cNvPr>
@@ -536,7 +536,7 @@
           <a:bodyPr/>
           <a:lstStyle/>
           <a:p>
-            <a:fld id="{FBB834C8-1C69-4AE2-ABD8-739AFBCCE343}" type="slidenum">
+            <a:fld id="{60E826E4-EB5D-4DEC-AE89-FEC89D45D90D}" type="slidenum">
               <a:rPr kumimoji="1" lang="ja-JP" altLang="en-US" smtClean="0"/>
               <a:t>‹#›</a:t>
             </a:fld>
@@ -547,7 +547,7 @@
     </p:spTree>
     <p:extLst>
       <p:ext uri="{BB962C8B-B14F-4D97-AF65-F5344CB8AC3E}">
-        <p14:creationId xmlns:p14="http://schemas.microsoft.com/office/powerpoint/2010/main" val="2607678075"/>
+        <p14:creationId xmlns:p14="http://schemas.microsoft.com/office/powerpoint/2010/main" val="918585659"/>
       </p:ext>
     </p:extLst>
   </p:cSld>
@@ -579,7 +579,7 @@
           <p:cNvPr id="2" name="縦書きタイトル 1">
             <a:extLst>
               <a:ext uri="{FF2B5EF4-FFF2-40B4-BE49-F238E27FC236}">
-                <a16:creationId xmlns:a16="http://schemas.microsoft.com/office/drawing/2014/main" id="{8B28491D-9FB4-5E93-5888-038BB5F2C944}"/>
+                <a16:creationId xmlns:a16="http://schemas.microsoft.com/office/drawing/2014/main" id="{D57F1336-A9C2-84D0-D22C-BDC83D1D7B37}"/>
               </a:ext>
             </a:extLst>
           </p:cNvPr>
@@ -612,7 +612,7 @@
           <p:cNvPr id="3" name="縦書きテキスト プレースホルダー 2">
             <a:extLst>
               <a:ext uri="{FF2B5EF4-FFF2-40B4-BE49-F238E27FC236}">
-                <a16:creationId xmlns:a16="http://schemas.microsoft.com/office/drawing/2014/main" id="{1AEC901E-89BA-7274-726C-C42AFAFF8145}"/>
+                <a16:creationId xmlns:a16="http://schemas.microsoft.com/office/drawing/2014/main" id="{C4963680-0A08-C520-E442-C06E08A2CF22}"/>
               </a:ext>
             </a:extLst>
           </p:cNvPr>
@@ -706,7 +706,7 @@
           <p:cNvPr id="4" name="日付プレースホルダー 3">
             <a:extLst>
               <a:ext uri="{FF2B5EF4-FFF2-40B4-BE49-F238E27FC236}">
-                <a16:creationId xmlns:a16="http://schemas.microsoft.com/office/drawing/2014/main" id="{6165A425-26FC-535C-C13B-5745DE859E10}"/>
+                <a16:creationId xmlns:a16="http://schemas.microsoft.com/office/drawing/2014/main" id="{02EF0193-F733-3BC2-472C-630F427AB688}"/>
               </a:ext>
             </a:extLst>
           </p:cNvPr>
@@ -722,7 +722,7 @@
           <a:bodyPr/>
           <a:lstStyle/>
           <a:p>
-            <a:fld id="{6B578DF8-FB2F-46D3-B110-102981A138C5}" type="datetimeFigureOut">
+            <a:fld id="{C3E17197-C805-4071-8EFC-A7354228F1B8}" type="datetimeFigureOut">
               <a:rPr kumimoji="1" lang="ja-JP" altLang="en-US" smtClean="0"/>
               <a:t>2026/9/20</a:t>
             </a:fld>
@@ -735,7 +735,7 @@
           <p:cNvPr id="5" name="フッター プレースホルダー 4">
             <a:extLst>
               <a:ext uri="{FF2B5EF4-FFF2-40B4-BE49-F238E27FC236}">
-                <a16:creationId xmlns:a16="http://schemas.microsoft.com/office/drawing/2014/main" id="{6B646C34-15EC-5E92-164F-46FA9DBE55A9}"/>
+                <a16:creationId xmlns:a16="http://schemas.microsoft.com/office/drawing/2014/main" id="{AFD5CE86-3FDF-04DA-DB9F-CD64C1224BF2}"/>
               </a:ext>
             </a:extLst>
           </p:cNvPr>
@@ -760,7 +760,7 @@
           <p:cNvPr id="6" name="スライド番号プレースホルダー 5">
             <a:extLst>
               <a:ext uri="{FF2B5EF4-FFF2-40B4-BE49-F238E27FC236}">
-                <a16:creationId xmlns:a16="http://schemas.microsoft.com/office/drawing/2014/main" id="{50DB06C0-1321-A5EB-1C97-013C0B62290B}"/>
+                <a16:creationId xmlns:a16="http://schemas.microsoft.com/office/drawing/2014/main" id="{B7D8B024-E0C9-58BB-4E05-FE64FE145BB6}"/>
               </a:ext>
             </a:extLst>
           </p:cNvPr>
@@ -776,7 +776,7 @@
           <a:bodyPr/>
           <a:lstStyle/>
           <a:p>
-            <a:fld id="{FBB834C8-1C69-4AE2-ABD8-739AFBCCE343}" type="slidenum">
+            <a:fld id="{60E826E4-EB5D-4DEC-AE89-FEC89D45D90D}" type="slidenum">
               <a:rPr kumimoji="1" lang="ja-JP" altLang="en-US" smtClean="0"/>
               <a:t>‹#›</a:t>
             </a:fld>
@@ -787,7 +787,7 @@
     </p:spTree>
     <p:extLst>
       <p:ext uri="{BB962C8B-B14F-4D97-AF65-F5344CB8AC3E}">
-        <p14:creationId xmlns:p14="http://schemas.microsoft.com/office/powerpoint/2010/main" val="3130710302"/>
+        <p14:creationId xmlns:p14="http://schemas.microsoft.com/office/powerpoint/2010/main" val="4253283023"/>
       </p:ext>
     </p:extLst>
   </p:cSld>
@@ -819,7 +819,7 @@
           <p:cNvPr id="2" name="タイトル 1">
             <a:extLst>
               <a:ext uri="{FF2B5EF4-FFF2-40B4-BE49-F238E27FC236}">
-                <a16:creationId xmlns:a16="http://schemas.microsoft.com/office/drawing/2014/main" id="{0E018854-55D8-B820-9CBC-E22E9A8AA072}"/>
+                <a16:creationId xmlns:a16="http://schemas.microsoft.com/office/drawing/2014/main" id="{7292F0A9-B0FA-0DB8-84D5-C9BF7A08730C}"/>
               </a:ext>
             </a:extLst>
           </p:cNvPr>
@@ -847,7 +847,7 @@
           <p:cNvPr id="3" name="コンテンツ プレースホルダー 2">
             <a:extLst>
               <a:ext uri="{FF2B5EF4-FFF2-40B4-BE49-F238E27FC236}">
-                <a16:creationId xmlns:a16="http://schemas.microsoft.com/office/drawing/2014/main" id="{BF1F1859-F6DC-200B-3427-63E9F4494270}"/>
+                <a16:creationId xmlns:a16="http://schemas.microsoft.com/office/drawing/2014/main" id="{555B42EB-C889-7160-DEE3-E75C50E88779}"/>
               </a:ext>
             </a:extLst>
           </p:cNvPr>
@@ -936,7 +936,7 @@
           <p:cNvPr id="4" name="日付プレースホルダー 3">
             <a:extLst>
               <a:ext uri="{FF2B5EF4-FFF2-40B4-BE49-F238E27FC236}">
-                <a16:creationId xmlns:a16="http://schemas.microsoft.com/office/drawing/2014/main" id="{364D334C-017B-6FBB-B895-913E7456D0E1}"/>
+                <a16:creationId xmlns:a16="http://schemas.microsoft.com/office/drawing/2014/main" id="{8E69FDBA-0E57-29EE-A372-1D4DD9802439}"/>
               </a:ext>
             </a:extLst>
           </p:cNvPr>
@@ -952,7 +952,7 @@
           <a:bodyPr/>
           <a:lstStyle/>
           <a:p>
-            <a:fld id="{6B578DF8-FB2F-46D3-B110-102981A138C5}" type="datetimeFigureOut">
+            <a:fld id="{C3E17197-C805-4071-8EFC-A7354228F1B8}" type="datetimeFigureOut">
               <a:rPr kumimoji="1" lang="ja-JP" altLang="en-US" smtClean="0"/>
               <a:t>2026/9/20</a:t>
             </a:fld>
@@ -965,7 +965,7 @@
           <p:cNvPr id="5" name="フッター プレースホルダー 4">
             <a:extLst>
               <a:ext uri="{FF2B5EF4-FFF2-40B4-BE49-F238E27FC236}">
-                <a16:creationId xmlns:a16="http://schemas.microsoft.com/office/drawing/2014/main" id="{A3C162F2-2A81-BC15-5D5A-56FBFD3C14EE}"/>
+                <a16:creationId xmlns:a16="http://schemas.microsoft.com/office/drawing/2014/main" id="{D17E3BEC-6059-78B1-034C-BDD7321F3C2E}"/>
               </a:ext>
             </a:extLst>
           </p:cNvPr>
@@ -990,7 +990,7 @@
           <p:cNvPr id="6" name="スライド番号プレースホルダー 5">
             <a:extLst>
               <a:ext uri="{FF2B5EF4-FFF2-40B4-BE49-F238E27FC236}">
-                <a16:creationId xmlns:a16="http://schemas.microsoft.com/office/drawing/2014/main" id="{194D9B7C-9AAA-D271-A90F-7F60CDA2E177}"/>
+                <a16:creationId xmlns:a16="http://schemas.microsoft.com/office/drawing/2014/main" id="{A3E94843-5D58-08C9-B673-908095270EE6}"/>
               </a:ext>
             </a:extLst>
           </p:cNvPr>
@@ -1006,7 +1006,7 @@
           <a:bodyPr/>
           <a:lstStyle/>
           <a:p>
-            <a:fld id="{FBB834C8-1C69-4AE2-ABD8-739AFBCCE343}" type="slidenum">
+            <a:fld id="{60E826E4-EB5D-4DEC-AE89-FEC89D45D90D}" type="slidenum">
               <a:rPr kumimoji="1" lang="ja-JP" altLang="en-US" smtClean="0"/>
               <a:t>‹#›</a:t>
             </a:fld>
@@ -1017,7 +1017,7 @@
     </p:spTree>
     <p:extLst>
       <p:ext uri="{BB962C8B-B14F-4D97-AF65-F5344CB8AC3E}">
-        <p14:creationId xmlns:p14="http://schemas.microsoft.com/office/powerpoint/2010/main" val="2546630155"/>
+        <p14:creationId xmlns:p14="http://schemas.microsoft.com/office/powerpoint/2010/main" val="3668718440"/>
       </p:ext>
     </p:extLst>
   </p:cSld>
@@ -1049,7 +1049,7 @@
           <p:cNvPr id="2" name="タイトル 1">
             <a:extLst>
               <a:ext uri="{FF2B5EF4-FFF2-40B4-BE49-F238E27FC236}">
-                <a16:creationId xmlns:a16="http://schemas.microsoft.com/office/drawing/2014/main" id="{A1049206-B38F-C9FF-C002-B899E9AF123D}"/>
+                <a16:creationId xmlns:a16="http://schemas.microsoft.com/office/drawing/2014/main" id="{E4DAD77E-FD6B-8D45-642C-49EC858D70B0}"/>
               </a:ext>
             </a:extLst>
           </p:cNvPr>
@@ -1086,7 +1086,7 @@
           <p:cNvPr id="3" name="テキスト プレースホルダー 2">
             <a:extLst>
               <a:ext uri="{FF2B5EF4-FFF2-40B4-BE49-F238E27FC236}">
-                <a16:creationId xmlns:a16="http://schemas.microsoft.com/office/drawing/2014/main" id="{A18756CF-684E-D2AC-EECB-00CCDECFD8CB}"/>
+                <a16:creationId xmlns:a16="http://schemas.microsoft.com/office/drawing/2014/main" id="{BBEC97A3-E3F2-836F-BCD2-A8A941C7449A}"/>
               </a:ext>
             </a:extLst>
           </p:cNvPr>
@@ -1211,7 +1211,7 @@
           <p:cNvPr id="4" name="日付プレースホルダー 3">
             <a:extLst>
               <a:ext uri="{FF2B5EF4-FFF2-40B4-BE49-F238E27FC236}">
-                <a16:creationId xmlns:a16="http://schemas.microsoft.com/office/drawing/2014/main" id="{4153BEE6-C086-4662-4A1B-095E85367202}"/>
+                <a16:creationId xmlns:a16="http://schemas.microsoft.com/office/drawing/2014/main" id="{36122028-3BEB-92C9-48E5-2A1D7210C25E}"/>
               </a:ext>
             </a:extLst>
           </p:cNvPr>
@@ -1227,7 +1227,7 @@
           <a:bodyPr/>
           <a:lstStyle/>
           <a:p>
-            <a:fld id="{6B578DF8-FB2F-46D3-B110-102981A138C5}" type="datetimeFigureOut">
+            <a:fld id="{C3E17197-C805-4071-8EFC-A7354228F1B8}" type="datetimeFigureOut">
               <a:rPr kumimoji="1" lang="ja-JP" altLang="en-US" smtClean="0"/>
               <a:t>2026/9/20</a:t>
             </a:fld>
@@ -1240,7 +1240,7 @@
           <p:cNvPr id="5" name="フッター プレースホルダー 4">
             <a:extLst>
               <a:ext uri="{FF2B5EF4-FFF2-40B4-BE49-F238E27FC236}">
-                <a16:creationId xmlns:a16="http://schemas.microsoft.com/office/drawing/2014/main" id="{922E6683-2A6E-13F1-5F25-346219EA8D88}"/>
+                <a16:creationId xmlns:a16="http://schemas.microsoft.com/office/drawing/2014/main" id="{9BEFF35E-D3A0-2DC3-1B6C-01CDCD9A0573}"/>
               </a:ext>
             </a:extLst>
           </p:cNvPr>
@@ -1265,7 +1265,7 @@
           <p:cNvPr id="6" name="スライド番号プレースホルダー 5">
             <a:extLst>
               <a:ext uri="{FF2B5EF4-FFF2-40B4-BE49-F238E27FC236}">
-                <a16:creationId xmlns:a16="http://schemas.microsoft.com/office/drawing/2014/main" id="{4C67D017-C968-15F2-25D5-2AFE109C9A1E}"/>
+                <a16:creationId xmlns:a16="http://schemas.microsoft.com/office/drawing/2014/main" id="{BF42BBD4-BF7E-423B-9883-1C578264808F}"/>
               </a:ext>
             </a:extLst>
           </p:cNvPr>
@@ -1281,7 +1281,7 @@
           <a:bodyPr/>
           <a:lstStyle/>
           <a:p>
-            <a:fld id="{FBB834C8-1C69-4AE2-ABD8-739AFBCCE343}" type="slidenum">
+            <a:fld id="{60E826E4-EB5D-4DEC-AE89-FEC89D45D90D}" type="slidenum">
               <a:rPr kumimoji="1" lang="ja-JP" altLang="en-US" smtClean="0"/>
               <a:t>‹#›</a:t>
             </a:fld>
@@ -1292,7 +1292,7 @@
     </p:spTree>
     <p:extLst>
       <p:ext uri="{BB962C8B-B14F-4D97-AF65-F5344CB8AC3E}">
-        <p14:creationId xmlns:p14="http://schemas.microsoft.com/office/powerpoint/2010/main" val="3537070843"/>
+        <p14:creationId xmlns:p14="http://schemas.microsoft.com/office/powerpoint/2010/main" val="979137271"/>
       </p:ext>
     </p:extLst>
   </p:cSld>
@@ -1324,7 +1324,7 @@
           <p:cNvPr id="2" name="タイトル 1">
             <a:extLst>
               <a:ext uri="{FF2B5EF4-FFF2-40B4-BE49-F238E27FC236}">
-                <a16:creationId xmlns:a16="http://schemas.microsoft.com/office/drawing/2014/main" id="{388CDD17-4413-3B27-E64D-83D587CB6579}"/>
+                <a16:creationId xmlns:a16="http://schemas.microsoft.com/office/drawing/2014/main" id="{0ACE960C-290B-7C45-8833-ACE6EB16E53E}"/>
               </a:ext>
             </a:extLst>
           </p:cNvPr>
@@ -1352,7 +1352,7 @@
           <p:cNvPr id="3" name="コンテンツ プレースホルダー 2">
             <a:extLst>
               <a:ext uri="{FF2B5EF4-FFF2-40B4-BE49-F238E27FC236}">
-                <a16:creationId xmlns:a16="http://schemas.microsoft.com/office/drawing/2014/main" id="{424CDDB5-A89D-3871-E427-799648D869D6}"/>
+                <a16:creationId xmlns:a16="http://schemas.microsoft.com/office/drawing/2014/main" id="{998371BC-205C-6F6C-87C3-F33DFAE8E990}"/>
               </a:ext>
             </a:extLst>
           </p:cNvPr>
@@ -1446,7 +1446,7 @@
           <p:cNvPr id="4" name="コンテンツ プレースホルダー 3">
             <a:extLst>
               <a:ext uri="{FF2B5EF4-FFF2-40B4-BE49-F238E27FC236}">
-                <a16:creationId xmlns:a16="http://schemas.microsoft.com/office/drawing/2014/main" id="{FE00BDEE-D9DD-D046-8FF2-409BB56F52F7}"/>
+                <a16:creationId xmlns:a16="http://schemas.microsoft.com/office/drawing/2014/main" id="{F1788FC5-0A9B-96DC-A0CB-6D22F7FE3EB6}"/>
               </a:ext>
             </a:extLst>
           </p:cNvPr>
@@ -1540,7 +1540,7 @@
           <p:cNvPr id="5" name="日付プレースホルダー 4">
             <a:extLst>
               <a:ext uri="{FF2B5EF4-FFF2-40B4-BE49-F238E27FC236}">
-                <a16:creationId xmlns:a16="http://schemas.microsoft.com/office/drawing/2014/main" id="{3AA70638-1B7C-C305-48D0-332E8D9E3C8C}"/>
+                <a16:creationId xmlns:a16="http://schemas.microsoft.com/office/drawing/2014/main" id="{80DD6FBC-9384-05DC-B88B-AF6F5B187D37}"/>
               </a:ext>
             </a:extLst>
           </p:cNvPr>
@@ -1556,7 +1556,7 @@
           <a:bodyPr/>
           <a:lstStyle/>
           <a:p>
-            <a:fld id="{6B578DF8-FB2F-46D3-B110-102981A138C5}" type="datetimeFigureOut">
+            <a:fld id="{C3E17197-C805-4071-8EFC-A7354228F1B8}" type="datetimeFigureOut">
               <a:rPr kumimoji="1" lang="ja-JP" altLang="en-US" smtClean="0"/>
               <a:t>2026/9/20</a:t>
             </a:fld>
@@ -1569,7 +1569,7 @@
           <p:cNvPr id="6" name="フッター プレースホルダー 5">
             <a:extLst>
               <a:ext uri="{FF2B5EF4-FFF2-40B4-BE49-F238E27FC236}">
-                <a16:creationId xmlns:a16="http://schemas.microsoft.com/office/drawing/2014/main" id="{1E2FB03D-81B0-A5A3-7E84-80A66173A27D}"/>
+                <a16:creationId xmlns:a16="http://schemas.microsoft.com/office/drawing/2014/main" id="{5E0824AD-94A5-8BDA-1030-7D5EF4CC04BA}"/>
               </a:ext>
             </a:extLst>
           </p:cNvPr>
@@ -1594,7 +1594,7 @@
           <p:cNvPr id="7" name="スライド番号プレースホルダー 6">
             <a:extLst>
               <a:ext uri="{FF2B5EF4-FFF2-40B4-BE49-F238E27FC236}">
-                <a16:creationId xmlns:a16="http://schemas.microsoft.com/office/drawing/2014/main" id="{EB8A6E19-6314-4A3B-8327-541BC2976F59}"/>
+                <a16:creationId xmlns:a16="http://schemas.microsoft.com/office/drawing/2014/main" id="{0AEE1146-C503-EF32-F633-C9F47F4C6303}"/>
               </a:ext>
             </a:extLst>
           </p:cNvPr>
@@ -1610,7 +1610,7 @@
           <a:bodyPr/>
           <a:lstStyle/>
           <a:p>
-            <a:fld id="{FBB834C8-1C69-4AE2-ABD8-739AFBCCE343}" type="slidenum">
+            <a:fld id="{60E826E4-EB5D-4DEC-AE89-FEC89D45D90D}" type="slidenum">
               <a:rPr kumimoji="1" lang="ja-JP" altLang="en-US" smtClean="0"/>
               <a:t>‹#›</a:t>
             </a:fld>
@@ -1621,7 +1621,7 @@
     </p:spTree>
     <p:extLst>
       <p:ext uri="{BB962C8B-B14F-4D97-AF65-F5344CB8AC3E}">
-        <p14:creationId xmlns:p14="http://schemas.microsoft.com/office/powerpoint/2010/main" val="1485634589"/>
+        <p14:creationId xmlns:p14="http://schemas.microsoft.com/office/powerpoint/2010/main" val="3721607537"/>
       </p:ext>
     </p:extLst>
   </p:cSld>
@@ -1653,7 +1653,7 @@
           <p:cNvPr id="2" name="タイトル 1">
             <a:extLst>
               <a:ext uri="{FF2B5EF4-FFF2-40B4-BE49-F238E27FC236}">
-                <a16:creationId xmlns:a16="http://schemas.microsoft.com/office/drawing/2014/main" id="{AE3D4326-1814-FCDE-C436-991BD924712A}"/>
+                <a16:creationId xmlns:a16="http://schemas.microsoft.com/office/drawing/2014/main" id="{E64ABA2B-A925-F668-3DC8-5AD16F8D82F8}"/>
               </a:ext>
             </a:extLst>
           </p:cNvPr>
@@ -1686,7 +1686,7 @@
           <p:cNvPr id="3" name="テキスト プレースホルダー 2">
             <a:extLst>
               <a:ext uri="{FF2B5EF4-FFF2-40B4-BE49-F238E27FC236}">
-                <a16:creationId xmlns:a16="http://schemas.microsoft.com/office/drawing/2014/main" id="{88183B79-DA09-3913-2E96-0A50E54FC821}"/>
+                <a16:creationId xmlns:a16="http://schemas.microsoft.com/office/drawing/2014/main" id="{284CE491-D960-FB1D-07D8-D9DD802AD2A9}"/>
               </a:ext>
             </a:extLst>
           </p:cNvPr>
@@ -1757,7 +1757,7 @@
           <p:cNvPr id="4" name="コンテンツ プレースホルダー 3">
             <a:extLst>
               <a:ext uri="{FF2B5EF4-FFF2-40B4-BE49-F238E27FC236}">
-                <a16:creationId xmlns:a16="http://schemas.microsoft.com/office/drawing/2014/main" id="{43A18F4A-CE5B-37A0-1E75-F608DDBA0747}"/>
+                <a16:creationId xmlns:a16="http://schemas.microsoft.com/office/drawing/2014/main" id="{F2E51360-E034-65A0-4EE5-495F4A99845F}"/>
               </a:ext>
             </a:extLst>
           </p:cNvPr>
@@ -1851,7 +1851,7 @@
           <p:cNvPr id="5" name="テキスト プレースホルダー 4">
             <a:extLst>
               <a:ext uri="{FF2B5EF4-FFF2-40B4-BE49-F238E27FC236}">
-                <a16:creationId xmlns:a16="http://schemas.microsoft.com/office/drawing/2014/main" id="{50D36D96-EEC4-6580-9A9D-BBD3C7A157EF}"/>
+                <a16:creationId xmlns:a16="http://schemas.microsoft.com/office/drawing/2014/main" id="{4CB355B9-B584-0908-5009-AB9957DD8BBE}"/>
               </a:ext>
             </a:extLst>
           </p:cNvPr>
@@ -1922,7 +1922,7 @@
           <p:cNvPr id="6" name="コンテンツ プレースホルダー 5">
             <a:extLst>
               <a:ext uri="{FF2B5EF4-FFF2-40B4-BE49-F238E27FC236}">
-                <a16:creationId xmlns:a16="http://schemas.microsoft.com/office/drawing/2014/main" id="{BAF74925-5F01-A393-72D6-0B9EEF46220D}"/>
+                <a16:creationId xmlns:a16="http://schemas.microsoft.com/office/drawing/2014/main" id="{C75B22FC-5446-4D3F-64F5-7CE40C0D1ADB}"/>
               </a:ext>
             </a:extLst>
           </p:cNvPr>
@@ -2016,7 +2016,7 @@
           <p:cNvPr id="7" name="日付プレースホルダー 6">
             <a:extLst>
               <a:ext uri="{FF2B5EF4-FFF2-40B4-BE49-F238E27FC236}">
-                <a16:creationId xmlns:a16="http://schemas.microsoft.com/office/drawing/2014/main" id="{821D048A-1AE1-0CB5-540B-081D87A62DDC}"/>
+                <a16:creationId xmlns:a16="http://schemas.microsoft.com/office/drawing/2014/main" id="{06217460-DA1F-25F1-EC99-459FA7AF9384}"/>
               </a:ext>
             </a:extLst>
           </p:cNvPr>
@@ -2032,7 +2032,7 @@
           <a:bodyPr/>
           <a:lstStyle/>
           <a:p>
-            <a:fld id="{6B578DF8-FB2F-46D3-B110-102981A138C5}" type="datetimeFigureOut">
+            <a:fld id="{C3E17197-C805-4071-8EFC-A7354228F1B8}" type="datetimeFigureOut">
               <a:rPr kumimoji="1" lang="ja-JP" altLang="en-US" smtClean="0"/>
               <a:t>2026/9/20</a:t>
             </a:fld>
@@ -2045,7 +2045,7 @@
           <p:cNvPr id="8" name="フッター プレースホルダー 7">
             <a:extLst>
               <a:ext uri="{FF2B5EF4-FFF2-40B4-BE49-F238E27FC236}">
-                <a16:creationId xmlns:a16="http://schemas.microsoft.com/office/drawing/2014/main" id="{669665F9-2A1C-7D64-311D-BEFC15FED2E0}"/>
+                <a16:creationId xmlns:a16="http://schemas.microsoft.com/office/drawing/2014/main" id="{0ABF71BA-C7E2-DC0B-3DBE-91BDAF59E901}"/>
               </a:ext>
             </a:extLst>
           </p:cNvPr>
@@ -2070,7 +2070,7 @@
           <p:cNvPr id="9" name="スライド番号プレースホルダー 8">
             <a:extLst>
               <a:ext uri="{FF2B5EF4-FFF2-40B4-BE49-F238E27FC236}">
-                <a16:creationId xmlns:a16="http://schemas.microsoft.com/office/drawing/2014/main" id="{9AAD8BFF-D35C-C732-4B54-6E9C4E3F0167}"/>
+                <a16:creationId xmlns:a16="http://schemas.microsoft.com/office/drawing/2014/main" id="{F2B3FC5C-A2E4-0876-D7B2-0250B18D4AE3}"/>
               </a:ext>
             </a:extLst>
           </p:cNvPr>
@@ -2086,7 +2086,7 @@
           <a:bodyPr/>
           <a:lstStyle/>
           <a:p>
-            <a:fld id="{FBB834C8-1C69-4AE2-ABD8-739AFBCCE343}" type="slidenum">
+            <a:fld id="{60E826E4-EB5D-4DEC-AE89-FEC89D45D90D}" type="slidenum">
               <a:rPr kumimoji="1" lang="ja-JP" altLang="en-US" smtClean="0"/>
               <a:t>‹#›</a:t>
             </a:fld>
@@ -2097,7 +2097,7 @@
     </p:spTree>
     <p:extLst>
       <p:ext uri="{BB962C8B-B14F-4D97-AF65-F5344CB8AC3E}">
-        <p14:creationId xmlns:p14="http://schemas.microsoft.com/office/powerpoint/2010/main" val="2072294597"/>
+        <p14:creationId xmlns:p14="http://schemas.microsoft.com/office/powerpoint/2010/main" val="2949905732"/>
       </p:ext>
     </p:extLst>
   </p:cSld>
@@ -2129,7 +2129,7 @@
           <p:cNvPr id="2" name="タイトル 1">
             <a:extLst>
               <a:ext uri="{FF2B5EF4-FFF2-40B4-BE49-F238E27FC236}">
-                <a16:creationId xmlns:a16="http://schemas.microsoft.com/office/drawing/2014/main" id="{EC52E05C-78EE-8544-FA09-A9505D0699D8}"/>
+                <a16:creationId xmlns:a16="http://schemas.microsoft.com/office/drawing/2014/main" id="{DFB4DCB8-8D3A-D7AF-E38C-6EB181373EBD}"/>
               </a:ext>
             </a:extLst>
           </p:cNvPr>
@@ -2157,7 +2157,7 @@
           <p:cNvPr id="3" name="日付プレースホルダー 2">
             <a:extLst>
               <a:ext uri="{FF2B5EF4-FFF2-40B4-BE49-F238E27FC236}">
-                <a16:creationId xmlns:a16="http://schemas.microsoft.com/office/drawing/2014/main" id="{649A24D9-F0F4-9162-7629-43100AFE40BB}"/>
+                <a16:creationId xmlns:a16="http://schemas.microsoft.com/office/drawing/2014/main" id="{3D62CEEC-B69F-9517-79AD-4D603FD99B80}"/>
               </a:ext>
             </a:extLst>
           </p:cNvPr>
@@ -2173,7 +2173,7 @@
           <a:bodyPr/>
           <a:lstStyle/>
           <a:p>
-            <a:fld id="{6B578DF8-FB2F-46D3-B110-102981A138C5}" type="datetimeFigureOut">
+            <a:fld id="{C3E17197-C805-4071-8EFC-A7354228F1B8}" type="datetimeFigureOut">
               <a:rPr kumimoji="1" lang="ja-JP" altLang="en-US" smtClean="0"/>
               <a:t>2026/9/20</a:t>
             </a:fld>
@@ -2186,7 +2186,7 @@
           <p:cNvPr id="4" name="フッター プレースホルダー 3">
             <a:extLst>
               <a:ext uri="{FF2B5EF4-FFF2-40B4-BE49-F238E27FC236}">
-                <a16:creationId xmlns:a16="http://schemas.microsoft.com/office/drawing/2014/main" id="{7A3A325B-D411-BA80-5425-475501F69256}"/>
+                <a16:creationId xmlns:a16="http://schemas.microsoft.com/office/drawing/2014/main" id="{00F0EC87-7C4D-BCA9-CD5C-0FD0F6AD464F}"/>
               </a:ext>
             </a:extLst>
           </p:cNvPr>
@@ -2211,7 +2211,7 @@
           <p:cNvPr id="5" name="スライド番号プレースホルダー 4">
             <a:extLst>
               <a:ext uri="{FF2B5EF4-FFF2-40B4-BE49-F238E27FC236}">
-                <a16:creationId xmlns:a16="http://schemas.microsoft.com/office/drawing/2014/main" id="{4427F922-ED20-806B-FC92-D444133CFBF0}"/>
+                <a16:creationId xmlns:a16="http://schemas.microsoft.com/office/drawing/2014/main" id="{2AADCB5C-696E-E6A5-D731-EA5020CFA146}"/>
               </a:ext>
             </a:extLst>
           </p:cNvPr>
@@ -2227,7 +2227,7 @@
           <a:bodyPr/>
           <a:lstStyle/>
           <a:p>
-            <a:fld id="{FBB834C8-1C69-4AE2-ABD8-739AFBCCE343}" type="slidenum">
+            <a:fld id="{60E826E4-EB5D-4DEC-AE89-FEC89D45D90D}" type="slidenum">
               <a:rPr kumimoji="1" lang="ja-JP" altLang="en-US" smtClean="0"/>
               <a:t>‹#›</a:t>
             </a:fld>
@@ -2238,7 +2238,7 @@
     </p:spTree>
     <p:extLst>
       <p:ext uri="{BB962C8B-B14F-4D97-AF65-F5344CB8AC3E}">
-        <p14:creationId xmlns:p14="http://schemas.microsoft.com/office/powerpoint/2010/main" val="3608657251"/>
+        <p14:creationId xmlns:p14="http://schemas.microsoft.com/office/powerpoint/2010/main" val="2874657519"/>
       </p:ext>
     </p:extLst>
   </p:cSld>
@@ -2270,7 +2270,7 @@
           <p:cNvPr id="2" name="日付プレースホルダー 1">
             <a:extLst>
               <a:ext uri="{FF2B5EF4-FFF2-40B4-BE49-F238E27FC236}">
-                <a16:creationId xmlns:a16="http://schemas.microsoft.com/office/drawing/2014/main" id="{7BFB64FF-7500-D0AE-1A79-5AD94BFEC55D}"/>
+                <a16:creationId xmlns:a16="http://schemas.microsoft.com/office/drawing/2014/main" id="{EE388430-F7AB-70D5-A874-758B3866C45B}"/>
               </a:ext>
             </a:extLst>
           </p:cNvPr>
@@ -2286,7 +2286,7 @@
           <a:bodyPr/>
           <a:lstStyle/>
           <a:p>
-            <a:fld id="{6B578DF8-FB2F-46D3-B110-102981A138C5}" type="datetimeFigureOut">
+            <a:fld id="{C3E17197-C805-4071-8EFC-A7354228F1B8}" type="datetimeFigureOut">
               <a:rPr kumimoji="1" lang="ja-JP" altLang="en-US" smtClean="0"/>
               <a:t>2026/9/20</a:t>
             </a:fld>
@@ -2299,7 +2299,7 @@
           <p:cNvPr id="3" name="フッター プレースホルダー 2">
             <a:extLst>
               <a:ext uri="{FF2B5EF4-FFF2-40B4-BE49-F238E27FC236}">
-                <a16:creationId xmlns:a16="http://schemas.microsoft.com/office/drawing/2014/main" id="{6341A739-2709-813C-687F-4B1F319BFA0B}"/>
+                <a16:creationId xmlns:a16="http://schemas.microsoft.com/office/drawing/2014/main" id="{0CDDDBC6-81C1-989D-363F-414A921C3FB6}"/>
               </a:ext>
             </a:extLst>
           </p:cNvPr>
@@ -2324,7 +2324,7 @@
           <p:cNvPr id="4" name="スライド番号プレースホルダー 3">
             <a:extLst>
               <a:ext uri="{FF2B5EF4-FFF2-40B4-BE49-F238E27FC236}">
-                <a16:creationId xmlns:a16="http://schemas.microsoft.com/office/drawing/2014/main" id="{A972C52A-FB0C-44D7-D8C8-878B45BF13C1}"/>
+                <a16:creationId xmlns:a16="http://schemas.microsoft.com/office/drawing/2014/main" id="{D225577E-7640-0983-5D38-8761E27363C6}"/>
               </a:ext>
             </a:extLst>
           </p:cNvPr>
@@ -2340,7 +2340,7 @@
           <a:bodyPr/>
           <a:lstStyle/>
           <a:p>
-            <a:fld id="{FBB834C8-1C69-4AE2-ABD8-739AFBCCE343}" type="slidenum">
+            <a:fld id="{60E826E4-EB5D-4DEC-AE89-FEC89D45D90D}" type="slidenum">
               <a:rPr kumimoji="1" lang="ja-JP" altLang="en-US" smtClean="0"/>
               <a:t>‹#›</a:t>
             </a:fld>
@@ -2351,7 +2351,7 @@
     </p:spTree>
     <p:extLst>
       <p:ext uri="{BB962C8B-B14F-4D97-AF65-F5344CB8AC3E}">
-        <p14:creationId xmlns:p14="http://schemas.microsoft.com/office/powerpoint/2010/main" val="721506875"/>
+        <p14:creationId xmlns:p14="http://schemas.microsoft.com/office/powerpoint/2010/main" val="12146078"/>
       </p:ext>
     </p:extLst>
   </p:cSld>
@@ -2383,7 +2383,7 @@
           <p:cNvPr id="2" name="タイトル 1">
             <a:extLst>
               <a:ext uri="{FF2B5EF4-FFF2-40B4-BE49-F238E27FC236}">
-                <a16:creationId xmlns:a16="http://schemas.microsoft.com/office/drawing/2014/main" id="{6ABDECC7-3388-2B04-4206-D5E5CF01CFE1}"/>
+                <a16:creationId xmlns:a16="http://schemas.microsoft.com/office/drawing/2014/main" id="{CD96BBEC-7943-43CF-B32B-F24F0739403D}"/>
               </a:ext>
             </a:extLst>
           </p:cNvPr>
@@ -2420,7 +2420,7 @@
           <p:cNvPr id="3" name="コンテンツ プレースホルダー 2">
             <a:extLst>
               <a:ext uri="{FF2B5EF4-FFF2-40B4-BE49-F238E27FC236}">
-                <a16:creationId xmlns:a16="http://schemas.microsoft.com/office/drawing/2014/main" id="{4E9B1230-008B-38EB-93C5-5F2D147B93E2}"/>
+                <a16:creationId xmlns:a16="http://schemas.microsoft.com/office/drawing/2014/main" id="{9F43D0D6-43A3-B9AC-091E-60D119195742}"/>
               </a:ext>
             </a:extLst>
           </p:cNvPr>
@@ -2542,7 +2542,7 @@
           <p:cNvPr id="4" name="テキスト プレースホルダー 3">
             <a:extLst>
               <a:ext uri="{FF2B5EF4-FFF2-40B4-BE49-F238E27FC236}">
-                <a16:creationId xmlns:a16="http://schemas.microsoft.com/office/drawing/2014/main" id="{83723640-07AA-77EA-4EDE-55040D134C43}"/>
+                <a16:creationId xmlns:a16="http://schemas.microsoft.com/office/drawing/2014/main" id="{3431428E-DA38-BF96-9DFC-6D1641E59B0D}"/>
               </a:ext>
             </a:extLst>
           </p:cNvPr>
@@ -2613,7 +2613,7 @@
           <p:cNvPr id="5" name="日付プレースホルダー 4">
             <a:extLst>
               <a:ext uri="{FF2B5EF4-FFF2-40B4-BE49-F238E27FC236}">
-                <a16:creationId xmlns:a16="http://schemas.microsoft.com/office/drawing/2014/main" id="{ECD7379C-F6D9-3EC2-BAC7-F49F48BC4DA4}"/>
+                <a16:creationId xmlns:a16="http://schemas.microsoft.com/office/drawing/2014/main" id="{BD4F8E32-C38F-A8E1-EF05-59CE81187C7C}"/>
               </a:ext>
             </a:extLst>
           </p:cNvPr>
@@ -2629,7 +2629,7 @@
           <a:bodyPr/>
           <a:lstStyle/>
           <a:p>
-            <a:fld id="{6B578DF8-FB2F-46D3-B110-102981A138C5}" type="datetimeFigureOut">
+            <a:fld id="{C3E17197-C805-4071-8EFC-A7354228F1B8}" type="datetimeFigureOut">
               <a:rPr kumimoji="1" lang="ja-JP" altLang="en-US" smtClean="0"/>
               <a:t>2026/9/20</a:t>
             </a:fld>
@@ -2642,7 +2642,7 @@
           <p:cNvPr id="6" name="フッター プレースホルダー 5">
             <a:extLst>
               <a:ext uri="{FF2B5EF4-FFF2-40B4-BE49-F238E27FC236}">
-                <a16:creationId xmlns:a16="http://schemas.microsoft.com/office/drawing/2014/main" id="{E40B6D37-86B0-AA0A-5555-FE76F2C01AC9}"/>
+                <a16:creationId xmlns:a16="http://schemas.microsoft.com/office/drawing/2014/main" id="{F296D9B0-A605-FAB7-E11C-F67E13E9DC83}"/>
               </a:ext>
             </a:extLst>
           </p:cNvPr>
@@ -2667,7 +2667,7 @@
           <p:cNvPr id="7" name="スライド番号プレースホルダー 6">
             <a:extLst>
               <a:ext uri="{FF2B5EF4-FFF2-40B4-BE49-F238E27FC236}">
-                <a16:creationId xmlns:a16="http://schemas.microsoft.com/office/drawing/2014/main" id="{D1267383-CD3F-4AA8-62AB-D0E16E1C00DD}"/>
+                <a16:creationId xmlns:a16="http://schemas.microsoft.com/office/drawing/2014/main" id="{6701AD97-3C91-3FD5-4A13-50D6753E6079}"/>
               </a:ext>
             </a:extLst>
           </p:cNvPr>
@@ -2683,7 +2683,7 @@
           <a:bodyPr/>
           <a:lstStyle/>
           <a:p>
-            <a:fld id="{FBB834C8-1C69-4AE2-ABD8-739AFBCCE343}" type="slidenum">
+            <a:fld id="{60E826E4-EB5D-4DEC-AE89-FEC89D45D90D}" type="slidenum">
               <a:rPr kumimoji="1" lang="ja-JP" altLang="en-US" smtClean="0"/>
               <a:t>‹#›</a:t>
             </a:fld>
@@ -2694,7 +2694,7 @@
     </p:spTree>
     <p:extLst>
       <p:ext uri="{BB962C8B-B14F-4D97-AF65-F5344CB8AC3E}">
-        <p14:creationId xmlns:p14="http://schemas.microsoft.com/office/powerpoint/2010/main" val="564356875"/>
+        <p14:creationId xmlns:p14="http://schemas.microsoft.com/office/powerpoint/2010/main" val="308622370"/>
       </p:ext>
     </p:extLst>
   </p:cSld>
@@ -2726,7 +2726,7 @@
           <p:cNvPr id="2" name="タイトル 1">
             <a:extLst>
               <a:ext uri="{FF2B5EF4-FFF2-40B4-BE49-F238E27FC236}">
-                <a16:creationId xmlns:a16="http://schemas.microsoft.com/office/drawing/2014/main" id="{E9F4D592-E107-51BC-8B51-BEB20D609690}"/>
+                <a16:creationId xmlns:a16="http://schemas.microsoft.com/office/drawing/2014/main" id="{AB82DCEC-831C-2A03-F04F-C5CB9317DB50}"/>
               </a:ext>
             </a:extLst>
           </p:cNvPr>
@@ -2763,7 +2763,7 @@
           <p:cNvPr id="3" name="図プレースホルダー 2">
             <a:extLst>
               <a:ext uri="{FF2B5EF4-FFF2-40B4-BE49-F238E27FC236}">
-                <a16:creationId xmlns:a16="http://schemas.microsoft.com/office/drawing/2014/main" id="{02D096FD-5BD1-FE0E-CD3C-651A45A8CAB5}"/>
+                <a16:creationId xmlns:a16="http://schemas.microsoft.com/office/drawing/2014/main" id="{28C844C2-E853-8183-E8DC-86454362E1D9}"/>
               </a:ext>
             </a:extLst>
           </p:cNvPr>
@@ -2830,7 +2830,7 @@
           <p:cNvPr id="4" name="テキスト プレースホルダー 3">
             <a:extLst>
               <a:ext uri="{FF2B5EF4-FFF2-40B4-BE49-F238E27FC236}">
-                <a16:creationId xmlns:a16="http://schemas.microsoft.com/office/drawing/2014/main" id="{DA14C59A-E3EC-7DE4-F465-5C930D7F3143}"/>
+                <a16:creationId xmlns:a16="http://schemas.microsoft.com/office/drawing/2014/main" id="{11FEDD18-9F8C-F59F-B99F-A66849E2713B}"/>
               </a:ext>
             </a:extLst>
           </p:cNvPr>
@@ -2901,7 +2901,7 @@
           <p:cNvPr id="5" name="日付プレースホルダー 4">
             <a:extLst>
               <a:ext uri="{FF2B5EF4-FFF2-40B4-BE49-F238E27FC236}">
-                <a16:creationId xmlns:a16="http://schemas.microsoft.com/office/drawing/2014/main" id="{B6A2EF91-9A54-9A35-7B22-1BEFFEF4D1B7}"/>
+                <a16:creationId xmlns:a16="http://schemas.microsoft.com/office/drawing/2014/main" id="{D75CC985-C4F3-C2E2-4CD6-BAA1A51E9785}"/>
               </a:ext>
             </a:extLst>
           </p:cNvPr>
@@ -2917,7 +2917,7 @@
           <a:bodyPr/>
           <a:lstStyle/>
           <a:p>
-            <a:fld id="{6B578DF8-FB2F-46D3-B110-102981A138C5}" type="datetimeFigureOut">
+            <a:fld id="{C3E17197-C805-4071-8EFC-A7354228F1B8}" type="datetimeFigureOut">
               <a:rPr kumimoji="1" lang="ja-JP" altLang="en-US" smtClean="0"/>
               <a:t>2026/9/20</a:t>
             </a:fld>
@@ -2930,7 +2930,7 @@
           <p:cNvPr id="6" name="フッター プレースホルダー 5">
             <a:extLst>
               <a:ext uri="{FF2B5EF4-FFF2-40B4-BE49-F238E27FC236}">
-                <a16:creationId xmlns:a16="http://schemas.microsoft.com/office/drawing/2014/main" id="{8E853EA4-D781-D808-9C47-A46362658DCD}"/>
+                <a16:creationId xmlns:a16="http://schemas.microsoft.com/office/drawing/2014/main" id="{E0C5B8B9-3107-3045-CFD9-4BD5656EC9FA}"/>
               </a:ext>
             </a:extLst>
           </p:cNvPr>
@@ -2955,7 +2955,7 @@
           <p:cNvPr id="7" name="スライド番号プレースホルダー 6">
             <a:extLst>
               <a:ext uri="{FF2B5EF4-FFF2-40B4-BE49-F238E27FC236}">
-                <a16:creationId xmlns:a16="http://schemas.microsoft.com/office/drawing/2014/main" id="{DDDAAB16-C845-3961-2C33-CC16C56001B2}"/>
+                <a16:creationId xmlns:a16="http://schemas.microsoft.com/office/drawing/2014/main" id="{87B2257B-5DDE-3172-A386-9F92127C782E}"/>
               </a:ext>
             </a:extLst>
           </p:cNvPr>
@@ -2971,7 +2971,7 @@
           <a:bodyPr/>
           <a:lstStyle/>
           <a:p>
-            <a:fld id="{FBB834C8-1C69-4AE2-ABD8-739AFBCCE343}" type="slidenum">
+            <a:fld id="{60E826E4-EB5D-4DEC-AE89-FEC89D45D90D}" type="slidenum">
               <a:rPr kumimoji="1" lang="ja-JP" altLang="en-US" smtClean="0"/>
               <a:t>‹#›</a:t>
             </a:fld>
@@ -2982,7 +2982,7 @@
     </p:spTree>
     <p:extLst>
       <p:ext uri="{BB962C8B-B14F-4D97-AF65-F5344CB8AC3E}">
-        <p14:creationId xmlns:p14="http://schemas.microsoft.com/office/powerpoint/2010/main" val="399985886"/>
+        <p14:creationId xmlns:p14="http://schemas.microsoft.com/office/powerpoint/2010/main" val="3694461166"/>
       </p:ext>
     </p:extLst>
   </p:cSld>
@@ -3019,7 +3019,7 @@
           <p:cNvPr id="2" name="タイトル プレースホルダー 1">
             <a:extLst>
               <a:ext uri="{FF2B5EF4-FFF2-40B4-BE49-F238E27FC236}">
-                <a16:creationId xmlns:a16="http://schemas.microsoft.com/office/drawing/2014/main" id="{448B3DCD-7470-3C9C-59E6-CF1E33836515}"/>
+                <a16:creationId xmlns:a16="http://schemas.microsoft.com/office/drawing/2014/main" id="{BCD6EDDC-C526-B57F-736B-D5AE87C8BC73}"/>
               </a:ext>
             </a:extLst>
           </p:cNvPr>
@@ -3057,7 +3057,7 @@
           <p:cNvPr id="3" name="テキスト プレースホルダー 2">
             <a:extLst>
               <a:ext uri="{FF2B5EF4-FFF2-40B4-BE49-F238E27FC236}">
-                <a16:creationId xmlns:a16="http://schemas.microsoft.com/office/drawing/2014/main" id="{B7D3A4E2-3250-2749-7A6A-223A8A7DCFA1}"/>
+                <a16:creationId xmlns:a16="http://schemas.microsoft.com/office/drawing/2014/main" id="{D0FB4D8B-58E8-ADDD-4176-527D5EB16040}"/>
               </a:ext>
             </a:extLst>
           </p:cNvPr>
@@ -3156,7 +3156,7 @@
           <p:cNvPr id="4" name="日付プレースホルダー 3">
             <a:extLst>
               <a:ext uri="{FF2B5EF4-FFF2-40B4-BE49-F238E27FC236}">
-                <a16:creationId xmlns:a16="http://schemas.microsoft.com/office/drawing/2014/main" id="{B6165F67-B095-3B76-4C52-3216045F73E0}"/>
+                <a16:creationId xmlns:a16="http://schemas.microsoft.com/office/drawing/2014/main" id="{7DFE1A4D-E80E-3D92-8A98-F13E215F0B9C}"/>
               </a:ext>
             </a:extLst>
           </p:cNvPr>
@@ -3190,7 +3190,7 @@
             </a:lvl1pPr>
           </a:lstStyle>
           <a:p>
-            <a:fld id="{6B578DF8-FB2F-46D3-B110-102981A138C5}" type="datetimeFigureOut">
+            <a:fld id="{C3E17197-C805-4071-8EFC-A7354228F1B8}" type="datetimeFigureOut">
               <a:rPr kumimoji="1" lang="ja-JP" altLang="en-US" smtClean="0"/>
               <a:t>2026/9/20</a:t>
             </a:fld>
@@ -3203,7 +3203,7 @@
           <p:cNvPr id="5" name="フッター プレースホルダー 4">
             <a:extLst>
               <a:ext uri="{FF2B5EF4-FFF2-40B4-BE49-F238E27FC236}">
-                <a16:creationId xmlns:a16="http://schemas.microsoft.com/office/drawing/2014/main" id="{FC61548C-060B-61D2-BA79-F38BBF2882C0}"/>
+                <a16:creationId xmlns:a16="http://schemas.microsoft.com/office/drawing/2014/main" id="{C37B68F7-6BFF-C8F5-066E-53214D8A9E23}"/>
               </a:ext>
             </a:extLst>
           </p:cNvPr>
@@ -3246,7 +3246,7 @@
           <p:cNvPr id="6" name="スライド番号プレースホルダー 5">
             <a:extLst>
               <a:ext uri="{FF2B5EF4-FFF2-40B4-BE49-F238E27FC236}">
-                <a16:creationId xmlns:a16="http://schemas.microsoft.com/office/drawing/2014/main" id="{175175BE-DE17-C461-E96F-768BB548E0B2}"/>
+                <a16:creationId xmlns:a16="http://schemas.microsoft.com/office/drawing/2014/main" id="{39BFD60A-201D-F7D3-4C00-C3649D654A3D}"/>
               </a:ext>
             </a:extLst>
           </p:cNvPr>
@@ -3280,7 +3280,7 @@
             </a:lvl1pPr>
           </a:lstStyle>
           <a:p>
-            <a:fld id="{FBB834C8-1C69-4AE2-ABD8-739AFBCCE343}" type="slidenum">
+            <a:fld id="{60E826E4-EB5D-4DEC-AE89-FEC89D45D90D}" type="slidenum">
               <a:rPr kumimoji="1" lang="ja-JP" altLang="en-US" smtClean="0"/>
               <a:t>‹#›</a:t>
             </a:fld>
@@ -3291,7 +3291,7 @@
     </p:spTree>
     <p:extLst>
       <p:ext uri="{BB962C8B-B14F-4D97-AF65-F5344CB8AC3E}">
-        <p14:creationId xmlns:p14="http://schemas.microsoft.com/office/powerpoint/2010/main" val="1065550306"/>
+        <p14:creationId xmlns:p14="http://schemas.microsoft.com/office/powerpoint/2010/main" val="3500452997"/>
       </p:ext>
     </p:extLst>
   </p:cSld>
@@ -3614,7 +3614,7 @@
           <p:cNvPr id="2" name="タイトル 1">
             <a:extLst>
               <a:ext uri="{FF2B5EF4-FFF2-40B4-BE49-F238E27FC236}">
-                <a16:creationId xmlns:a16="http://schemas.microsoft.com/office/drawing/2014/main" id="{68830635-3CA3-41D8-D1CE-F1AD02968A7E}"/>
+                <a16:creationId xmlns:a16="http://schemas.microsoft.com/office/drawing/2014/main" id="{913BAA39-4AD5-DD02-4571-3420787CB997}"/>
               </a:ext>
             </a:extLst>
           </p:cNvPr>
@@ -3643,7 +3643,7 @@
           <p:cNvPr id="3" name="字幕 2">
             <a:extLst>
               <a:ext uri="{FF2B5EF4-FFF2-40B4-BE49-F238E27FC236}">
-                <a16:creationId xmlns:a16="http://schemas.microsoft.com/office/drawing/2014/main" id="{B404DE2B-50E2-83B6-8D80-1918E6BEB3F0}"/>
+                <a16:creationId xmlns:a16="http://schemas.microsoft.com/office/drawing/2014/main" id="{A7548B53-C1D4-F8A2-C64B-85EA39282D18}"/>
               </a:ext>
             </a:extLst>
           </p:cNvPr>
@@ -3677,7 +3677,7 @@
     </p:spTree>
     <p:extLst>
       <p:ext uri="{BB962C8B-B14F-4D97-AF65-F5344CB8AC3E}">
-        <p14:creationId xmlns:p14="http://schemas.microsoft.com/office/powerpoint/2010/main" val="3750078336"/>
+        <p14:creationId xmlns:p14="http://schemas.microsoft.com/office/powerpoint/2010/main" val="3870561626"/>
       </p:ext>
     </p:extLst>
   </p:cSld>
